--- a/m4/diapositivos/aula-05-sermao-tribunal.pptx
+++ b/m4/diapositivos/aula-05-sermao-tribunal.pptx
@@ -5990,7 +5990,7 @@
               <a:buNone/>
             </a:pPr>
             <a:r>
-              <a:rPr lang="en-US" sz="2800" b="1" dirty="0">
+              <a:rPr lang="en-US" sz="3400" b="1" dirty="0">
                 <a:solidFill>
                   <a:srgbClr val="F2F0EA"/>
                 </a:solidFill>
@@ -5998,9 +5998,9 @@
                 <a:ea typeface="Arial" pitchFamily="34" charset="-122"/>
                 <a:cs typeface="Arial" pitchFamily="34" charset="-120"/>
               </a:rPr>
-              <a:t>Diz que os homens são como os peixes que se comem: a testemunha fala de homens, não de peixes</a:t>
-            </a:r>
-            <a:endParaRPr lang="en-US" sz="2800" dirty="0"/>
+              <a:t>Diz que os homens são como os peixes que se comem</a:t>
+            </a:r>
+            <a:endParaRPr lang="en-US" sz="3400" dirty="0"/>
           </a:p>
         </p:txBody>
       </p:sp>
@@ -8771,7 +8771,7 @@
         <p:spPr>
           <a:xfrm>
             <a:off x="1005840" y="2697480"/>
-            <a:ext cx="0" cy="2944368"/>
+            <a:ext cx="0" cy="1928368"/>
           </a:xfrm>
           <a:prstGeom prst="line">
             <a:avLst/>
@@ -8858,7 +8858,7 @@
         <p:spPr>
           <a:xfrm>
             <a:off x="1417320" y="2523744"/>
-            <a:ext cx="9174175" cy="981456"/>
+            <a:ext cx="9174175" cy="536956"/>
           </a:xfrm>
           <a:prstGeom prst="rect">
             <a:avLst/>
@@ -8879,7 +8879,7 @@
               <a:buNone/>
             </a:pPr>
             <a:r>
-              <a:rPr lang="en-US" sz="2400" dirty="0">
+              <a:rPr lang="en-US" sz="2000" dirty="0">
                 <a:solidFill>
                   <a:srgbClr val="F2F0EA"/>
                 </a:solidFill>
@@ -8887,9 +8887,9 @@
                 <a:ea typeface="Arial" pitchFamily="34" charset="-122"/>
                 <a:cs typeface="Arial" pitchFamily="34" charset="-120"/>
               </a:rPr>
-              <a:t>Vieira aplica o nome do peixe aos homens: a acusação sai do mar e nomeia um cargo</a:t>
-            </a:r>
-            <a:endParaRPr lang="en-US" sz="2400" dirty="0"/>
+              <a:t>Vieira aplica o nome do peixe aos homens: a acusação sai do mar</a:t>
+            </a:r>
+            <a:endParaRPr lang="en-US" sz="2000" dirty="0"/>
           </a:p>
         </p:txBody>
       </p:sp>
@@ -8901,7 +8901,7 @@
         </p:nvSpPr>
         <p:spPr>
           <a:xfrm>
-            <a:off x="822960" y="3496056"/>
+            <a:off x="822960" y="3051556"/>
             <a:ext cx="365760" cy="365760"/>
           </a:xfrm>
           <a:prstGeom prst="ellipse">
@@ -8926,7 +8926,7 @@
         </p:nvSpPr>
         <p:spPr>
           <a:xfrm>
-            <a:off x="822960" y="3496056"/>
+            <a:off x="822960" y="3051556"/>
             <a:ext cx="365760" cy="365760"/>
           </a:xfrm>
           <a:prstGeom prst="rect">
@@ -8965,8 +8965,8 @@
         </p:nvSpPr>
         <p:spPr>
           <a:xfrm>
-            <a:off x="1417320" y="3505200"/>
-            <a:ext cx="9174175" cy="981456"/>
+            <a:off x="1417320" y="3060700"/>
+            <a:ext cx="9174175" cy="854456"/>
           </a:xfrm>
           <a:prstGeom prst="rect">
             <a:avLst/>
@@ -8987,7 +8987,7 @@
               <a:buNone/>
             </a:pPr>
             <a:r>
-              <a:rPr lang="en-US" sz="2400" dirty="0">
+              <a:rPr lang="en-US" sz="2000" dirty="0">
                 <a:solidFill>
                   <a:srgbClr val="F2F0EA"/>
                 </a:solidFill>
@@ -8997,7 +8997,7 @@
               </a:rPr>
               <a:t>Vieira descreve peixes que acompanham os navios dos governadores</a:t>
             </a:r>
-            <a:endParaRPr lang="en-US" sz="2400" dirty="0"/>
+            <a:endParaRPr lang="en-US" sz="2000" dirty="0"/>
           </a:p>
         </p:txBody>
       </p:sp>
@@ -9009,7 +9009,7 @@
         </p:nvSpPr>
         <p:spPr>
           <a:xfrm>
-            <a:off x="822960" y="4477512"/>
+            <a:off x="822960" y="3906012"/>
             <a:ext cx="365760" cy="365760"/>
           </a:xfrm>
           <a:prstGeom prst="ellipse">
@@ -9034,7 +9034,7 @@
         </p:nvSpPr>
         <p:spPr>
           <a:xfrm>
-            <a:off x="822960" y="4477512"/>
+            <a:off x="822960" y="3906012"/>
             <a:ext cx="365760" cy="365760"/>
           </a:xfrm>
           <a:prstGeom prst="rect">
@@ -9073,8 +9073,8 @@
         </p:nvSpPr>
         <p:spPr>
           <a:xfrm>
-            <a:off x="1417320" y="4486656"/>
-            <a:ext cx="9174175" cy="981456"/>
+            <a:off x="1417320" y="3915156"/>
+            <a:ext cx="9174175" cy="536956"/>
           </a:xfrm>
           <a:prstGeom prst="rect">
             <a:avLst/>
@@ -9095,7 +9095,7 @@
               <a:buNone/>
             </a:pPr>
             <a:r>
-              <a:rPr lang="en-US" sz="2400" dirty="0">
+              <a:rPr lang="en-US" sz="2000" dirty="0">
                 <a:solidFill>
                   <a:srgbClr val="F2F0EA"/>
                 </a:solidFill>
@@ -9105,7 +9105,7 @@
               </a:rPr>
               <a:t>Vieira louva os governadores por protegerem os peixes pequenos</a:t>
             </a:r>
-            <a:endParaRPr lang="en-US" sz="2400" dirty="0"/>
+            <a:endParaRPr lang="en-US" sz="2000" dirty="0"/>
           </a:p>
         </p:txBody>
       </p:sp>
@@ -9117,7 +9117,7 @@
         </p:nvSpPr>
         <p:spPr>
           <a:xfrm>
-            <a:off x="822960" y="5458968"/>
+            <a:off x="822960" y="4442968"/>
             <a:ext cx="365760" cy="365760"/>
           </a:xfrm>
           <a:prstGeom prst="ellipse">
@@ -9142,7 +9142,7 @@
         </p:nvSpPr>
         <p:spPr>
           <a:xfrm>
-            <a:off x="822960" y="5458968"/>
+            <a:off x="822960" y="4442968"/>
             <a:ext cx="365760" cy="365760"/>
           </a:xfrm>
           <a:prstGeom prst="rect">
@@ -9181,8 +9181,8 @@
         </p:nvSpPr>
         <p:spPr>
           <a:xfrm>
-            <a:off x="1417320" y="5468112"/>
-            <a:ext cx="9174175" cy="600456"/>
+            <a:off x="1417320" y="4452112"/>
+            <a:ext cx="9174175" cy="854456"/>
           </a:xfrm>
           <a:prstGeom prst="rect">
             <a:avLst/>
@@ -9203,7 +9203,7 @@
               <a:buNone/>
             </a:pPr>
             <a:r>
-              <a:rPr lang="en-US" sz="2400" dirty="0">
+              <a:rPr lang="en-US" sz="2000" dirty="0">
                 <a:solidFill>
                   <a:srgbClr val="F2F0EA"/>
                 </a:solidFill>
@@ -9211,9 +9211,9 @@
                 <a:ea typeface="Arial" pitchFamily="34" charset="-122"/>
                 <a:cs typeface="Arial" pitchFamily="34" charset="-120"/>
               </a:rPr>
-              <a:t>Vieira pede desculpa aos pegadores pela comparação</a:t>
-            </a:r>
-            <a:endParaRPr lang="en-US" sz="2400" dirty="0"/>
+              <a:t>Vieira pede desculpa aos pegadores pela comparação com os homens</a:t>
+            </a:r>
+            <a:endParaRPr lang="en-US" sz="2000" dirty="0"/>
           </a:p>
         </p:txBody>
       </p:sp>
@@ -9462,7 +9462,7 @@
                 <a:ea typeface="Arial" pitchFamily="34" charset="-122"/>
                 <a:cs typeface="Arial" pitchFamily="34" charset="-120"/>
               </a:rPr>
-              <a:t>Vieira aplica o nome do peixe aos homens: a acusação sai do mar e nomeia um cargo</a:t>
+              <a:t>Vieira aplica o nome do peixe aos homens: a acusação sai do mar</a:t>
             </a:r>
             <a:endParaRPr lang="en-US" sz="3400" dirty="0"/>
           </a:p>
@@ -13598,7 +13598,7 @@
         <p:spPr>
           <a:xfrm>
             <a:off x="1005840" y="2697480"/>
-            <a:ext cx="0" cy="2563368"/>
+            <a:ext cx="0" cy="2404618"/>
           </a:xfrm>
           <a:prstGeom prst="line">
             <a:avLst/>
@@ -13685,7 +13685,7 @@
         <p:spPr>
           <a:xfrm>
             <a:off x="1417320" y="2523744"/>
-            <a:ext cx="9174175" cy="981456"/>
+            <a:ext cx="9174175" cy="917956"/>
           </a:xfrm>
           <a:prstGeom prst="rect">
             <a:avLst/>
@@ -13706,7 +13706,7 @@
               <a:buNone/>
             </a:pPr>
             <a:r>
-              <a:rPr lang="en-US" sz="2400" dirty="0">
+              <a:rPr lang="en-US" sz="2200" dirty="0">
                 <a:solidFill>
                   <a:srgbClr val="F2F0EA"/>
                 </a:solidFill>
@@ -13714,9 +13714,9 @@
                 <a:ea typeface="Arial" pitchFamily="34" charset="-122"/>
                 <a:cs typeface="Arial" pitchFamily="34" charset="-120"/>
               </a:rPr>
-              <a:t>Desmonta-a: Vieira diz à cidade que a doutrina era para ela, e deixa de haver dúvida sobre o réu</a:t>
-            </a:r>
-            <a:endParaRPr lang="en-US" sz="2400" dirty="0"/>
+              <a:t>Desmonta-a: Vieira diz à cidade que a doutrina era para ela</a:t>
+            </a:r>
+            <a:endParaRPr lang="en-US" sz="2200" dirty="0"/>
           </a:p>
         </p:txBody>
       </p:sp>
@@ -13728,7 +13728,7 @@
         </p:nvSpPr>
         <p:spPr>
           <a:xfrm>
-            <a:off x="822960" y="3496056"/>
+            <a:off x="822960" y="3432556"/>
             <a:ext cx="365760" cy="365760"/>
           </a:xfrm>
           <a:prstGeom prst="ellipse">
@@ -13753,7 +13753,7 @@
         </p:nvSpPr>
         <p:spPr>
           <a:xfrm>
-            <a:off x="822960" y="3496056"/>
+            <a:off x="822960" y="3432556"/>
             <a:ext cx="365760" cy="365760"/>
           </a:xfrm>
           <a:prstGeom prst="rect">
@@ -13792,8 +13792,8 @@
         </p:nvSpPr>
         <p:spPr>
           <a:xfrm>
-            <a:off x="1417320" y="3505200"/>
-            <a:ext cx="9174175" cy="981456"/>
+            <a:off x="1417320" y="3441700"/>
+            <a:ext cx="9174175" cy="568706"/>
           </a:xfrm>
           <a:prstGeom prst="rect">
             <a:avLst/>
@@ -13814,7 +13814,7 @@
               <a:buNone/>
             </a:pPr>
             <a:r>
-              <a:rPr lang="en-US" sz="2400" dirty="0">
+              <a:rPr lang="en-US" sz="2200" dirty="0">
                 <a:solidFill>
                   <a:srgbClr val="F2F0EA"/>
                 </a:solidFill>
@@ -13824,7 +13824,7 @@
               </a:rPr>
               <a:t>Confirma-a: Vieira admite que a doutrina se perdeu no mar</a:t>
             </a:r>
-            <a:endParaRPr lang="en-US" sz="2400" dirty="0"/>
+            <a:endParaRPr lang="en-US" sz="2200" dirty="0"/>
           </a:p>
         </p:txBody>
       </p:sp>
@@ -13836,7 +13836,7 @@
         </p:nvSpPr>
         <p:spPr>
           <a:xfrm>
-            <a:off x="822960" y="4477512"/>
+            <a:off x="822960" y="4001262"/>
             <a:ext cx="365760" cy="365760"/>
           </a:xfrm>
           <a:prstGeom prst="ellipse">
@@ -13861,7 +13861,7 @@
         </p:nvSpPr>
         <p:spPr>
           <a:xfrm>
-            <a:off x="822960" y="4477512"/>
+            <a:off x="822960" y="4001262"/>
             <a:ext cx="365760" cy="365760"/>
           </a:xfrm>
           <a:prstGeom prst="rect">
@@ -13900,8 +13900,8 @@
         </p:nvSpPr>
         <p:spPr>
           <a:xfrm>
-            <a:off x="1417320" y="4486656"/>
-            <a:ext cx="9174175" cy="600456"/>
+            <a:off x="1417320" y="4010406"/>
+            <a:ext cx="9174175" cy="917956"/>
           </a:xfrm>
           <a:prstGeom prst="rect">
             <a:avLst/>
@@ -13922,7 +13922,7 @@
               <a:buNone/>
             </a:pPr>
             <a:r>
-              <a:rPr lang="en-US" sz="2400" dirty="0">
+              <a:rPr lang="en-US" sz="2200" dirty="0">
                 <a:solidFill>
                   <a:srgbClr val="F2F0EA"/>
                 </a:solidFill>
@@ -13930,9 +13930,9 @@
                 <a:ea typeface="Arial" pitchFamily="34" charset="-122"/>
                 <a:cs typeface="Arial" pitchFamily="34" charset="-120"/>
               </a:rPr>
-              <a:t>Ignora-a: a frase fala só da qualidade da doutrina</a:t>
-            </a:r>
-            <a:endParaRPr lang="en-US" sz="2400" dirty="0"/>
+              <a:t>Ignora-a: a frase só fala da qualidade da doutrina pregada</a:t>
+            </a:r>
+            <a:endParaRPr lang="en-US" sz="2200" dirty="0"/>
           </a:p>
         </p:txBody>
       </p:sp>
@@ -13944,7 +13944,7 @@
         </p:nvSpPr>
         <p:spPr>
           <a:xfrm>
-            <a:off x="822960" y="5077968"/>
+            <a:off x="822960" y="4919218"/>
             <a:ext cx="365760" cy="365760"/>
           </a:xfrm>
           <a:prstGeom prst="ellipse">
@@ -13969,7 +13969,7 @@
         </p:nvSpPr>
         <p:spPr>
           <a:xfrm>
-            <a:off x="822960" y="5077968"/>
+            <a:off x="822960" y="4919218"/>
             <a:ext cx="365760" cy="365760"/>
           </a:xfrm>
           <a:prstGeom prst="rect">
@@ -14008,8 +14008,8 @@
         </p:nvSpPr>
         <p:spPr>
           <a:xfrm>
-            <a:off x="1417320" y="5087112"/>
-            <a:ext cx="9174175" cy="981456"/>
+            <a:off x="1417320" y="4928362"/>
+            <a:ext cx="9174175" cy="917956"/>
           </a:xfrm>
           <a:prstGeom prst="rect">
             <a:avLst/>
@@ -14030,7 +14030,7 @@
               <a:buNone/>
             </a:pPr>
             <a:r>
-              <a:rPr lang="en-US" sz="2400" dirty="0">
+              <a:rPr lang="en-US" sz="2200" dirty="0">
                 <a:solidFill>
                   <a:srgbClr val="F2F0EA"/>
                 </a:solidFill>
@@ -14038,9 +14038,9 @@
                 <a:ea typeface="Arial" pitchFamily="34" charset="-122"/>
                 <a:cs typeface="Arial" pitchFamily="34" charset="-120"/>
               </a:rPr>
-              <a:t>Reforça-a: Vieira diz que nunca quis falar aos homens</a:t>
-            </a:r>
-            <a:endParaRPr lang="en-US" sz="2400" dirty="0"/>
+              <a:t>Reforça-a: Vieira diz que nunca quis falar aos homens da terra</a:t>
+            </a:r>
+            <a:endParaRPr lang="en-US" sz="2200" dirty="0"/>
           </a:p>
         </p:txBody>
       </p:sp>
@@ -14604,7 +14604,7 @@
               <a:buNone/>
             </a:pPr>
             <a:r>
-              <a:rPr lang="en-US" sz="2800" b="1" dirty="0">
+              <a:rPr lang="en-US" sz="3400" b="1" dirty="0">
                 <a:solidFill>
                   <a:srgbClr val="F2F0EA"/>
                 </a:solidFill>
@@ -14612,9 +14612,9 @@
                 <a:ea typeface="Arial" pitchFamily="34" charset="-122"/>
                 <a:cs typeface="Arial" pitchFamily="34" charset="-120"/>
               </a:rPr>
-              <a:t>Desmonta-a: Vieira diz à cidade que a doutrina era para ela, e deixa de haver dúvida sobre o réu</a:t>
-            </a:r>
-            <a:endParaRPr lang="en-US" sz="2800" dirty="0"/>
+              <a:t>Desmonta-a: Vieira diz à cidade que a doutrina era para ela</a:t>
+            </a:r>
+            <a:endParaRPr lang="en-US" sz="3400" dirty="0"/>
           </a:p>
         </p:txBody>
       </p:sp>
@@ -17032,7 +17032,7 @@
         <p:spPr>
           <a:xfrm>
             <a:off x="1005840" y="2697480"/>
-            <a:ext cx="0" cy="2563368"/>
+            <a:ext cx="0" cy="2404618"/>
           </a:xfrm>
           <a:prstGeom prst="line">
             <a:avLst/>
@@ -17119,7 +17119,7 @@
         <p:spPr>
           <a:xfrm>
             <a:off x="1417320" y="2523744"/>
-            <a:ext cx="9174175" cy="1362456"/>
+            <a:ext cx="9174175" cy="568706"/>
           </a:xfrm>
           <a:prstGeom prst="rect">
             <a:avLst/>
@@ -17140,7 +17140,7 @@
               <a:buNone/>
             </a:pPr>
             <a:r>
-              <a:rPr lang="en-US" sz="2400" dirty="0">
+              <a:rPr lang="en-US" sz="2200" dirty="0">
                 <a:solidFill>
                   <a:srgbClr val="F2F0EA"/>
                 </a:solidFill>
@@ -17148,9 +17148,9 @@
                 <a:ea typeface="Arial" pitchFamily="34" charset="-122"/>
                 <a:cs typeface="Arial" pitchFamily="34" charset="-120"/>
               </a:rPr>
-              <a:t>Inverte-o: o pregador, que tem palavra, memória, entendimento e vontade, é quem mais pode ofender; os peixes ficam absolvidos</a:t>
-            </a:r>
-            <a:endParaRPr lang="en-US" sz="2400" dirty="0"/>
+              <a:t>Inverte-o: absolve os peixes e acusa o próprio pregador</a:t>
+            </a:r>
+            <a:endParaRPr lang="en-US" sz="2200" dirty="0"/>
           </a:p>
         </p:txBody>
       </p:sp>
@@ -17162,7 +17162,7 @@
         </p:nvSpPr>
         <p:spPr>
           <a:xfrm>
-            <a:off x="822960" y="3877056"/>
+            <a:off x="822960" y="3083306"/>
             <a:ext cx="365760" cy="365760"/>
           </a:xfrm>
           <a:prstGeom prst="ellipse">
@@ -17187,7 +17187,7 @@
         </p:nvSpPr>
         <p:spPr>
           <a:xfrm>
-            <a:off x="822960" y="3877056"/>
+            <a:off x="822960" y="3083306"/>
             <a:ext cx="365760" cy="365760"/>
           </a:xfrm>
           <a:prstGeom prst="rect">
@@ -17226,8 +17226,8 @@
         </p:nvSpPr>
         <p:spPr>
           <a:xfrm>
-            <a:off x="1417320" y="3886200"/>
-            <a:ext cx="9174175" cy="600456"/>
+            <a:off x="1417320" y="3092450"/>
+            <a:ext cx="9174175" cy="917956"/>
           </a:xfrm>
           <a:prstGeom prst="rect">
             <a:avLst/>
@@ -17248,7 +17248,7 @@
               <a:buNone/>
             </a:pPr>
             <a:r>
-              <a:rPr lang="en-US" sz="2400" dirty="0">
+              <a:rPr lang="en-US" sz="2200" dirty="0">
                 <a:solidFill>
                   <a:srgbClr val="F2F0EA"/>
                 </a:solidFill>
@@ -17256,9 +17256,9 @@
                 <a:ea typeface="Arial" pitchFamily="34" charset="-122"/>
                 <a:cs typeface="Arial" pitchFamily="34" charset="-120"/>
               </a:rPr>
-              <a:t>Encerra-o sem sentença: Vieira muda de assunto</a:t>
-            </a:r>
-            <a:endParaRPr lang="en-US" sz="2400" dirty="0"/>
+              <a:t>Encerra-o sem sentença nenhuma: Vieira muda logo de assunto</a:t>
+            </a:r>
+            <a:endParaRPr lang="en-US" sz="2200" dirty="0"/>
           </a:p>
         </p:txBody>
       </p:sp>
@@ -17270,7 +17270,7 @@
         </p:nvSpPr>
         <p:spPr>
           <a:xfrm>
-            <a:off x="822960" y="4477512"/>
+            <a:off x="822960" y="4001262"/>
             <a:ext cx="365760" cy="365760"/>
           </a:xfrm>
           <a:prstGeom prst="ellipse">
@@ -17295,7 +17295,7 @@
         </p:nvSpPr>
         <p:spPr>
           <a:xfrm>
-            <a:off x="822960" y="4477512"/>
+            <a:off x="822960" y="4001262"/>
             <a:ext cx="365760" cy="365760"/>
           </a:xfrm>
           <a:prstGeom prst="rect">
@@ -17334,8 +17334,8 @@
         </p:nvSpPr>
         <p:spPr>
           <a:xfrm>
-            <a:off x="1417320" y="4486656"/>
-            <a:ext cx="9174175" cy="600456"/>
+            <a:off x="1417320" y="4010406"/>
+            <a:ext cx="9174175" cy="917956"/>
           </a:xfrm>
           <a:prstGeom prst="rect">
             <a:avLst/>
@@ -17356,7 +17356,7 @@
               <a:buNone/>
             </a:pPr>
             <a:r>
-              <a:rPr lang="en-US" sz="2400" dirty="0">
+              <a:rPr lang="en-US" sz="2200" dirty="0">
                 <a:solidFill>
                   <a:srgbClr val="F2F0EA"/>
                 </a:solidFill>
@@ -17364,9 +17364,9 @@
                 <a:ea typeface="Arial" pitchFamily="34" charset="-122"/>
                 <a:cs typeface="Arial" pitchFamily="34" charset="-120"/>
               </a:rPr>
-              <a:t>Agrava-o para os peixes: são brutos e não têm razão</a:t>
-            </a:r>
-            <a:endParaRPr lang="en-US" sz="2400" dirty="0"/>
+              <a:t>Agrava-o para os peixes, porque são brutos e não têm razão</a:t>
+            </a:r>
+            <a:endParaRPr lang="en-US" sz="2200" dirty="0"/>
           </a:p>
         </p:txBody>
       </p:sp>
@@ -17378,7 +17378,7 @@
         </p:nvSpPr>
         <p:spPr>
           <a:xfrm>
-            <a:off x="822960" y="5077968"/>
+            <a:off x="822960" y="4919218"/>
             <a:ext cx="365760" cy="365760"/>
           </a:xfrm>
           <a:prstGeom prst="ellipse">
@@ -17403,7 +17403,7 @@
         </p:nvSpPr>
         <p:spPr>
           <a:xfrm>
-            <a:off x="822960" y="5077968"/>
+            <a:off x="822960" y="4919218"/>
             <a:ext cx="365760" cy="365760"/>
           </a:xfrm>
           <a:prstGeom prst="rect">
@@ -17442,8 +17442,8 @@
         </p:nvSpPr>
         <p:spPr>
           <a:xfrm>
-            <a:off x="1417320" y="5087112"/>
-            <a:ext cx="9174175" cy="600456"/>
+            <a:off x="1417320" y="4928362"/>
+            <a:ext cx="9174175" cy="917956"/>
           </a:xfrm>
           <a:prstGeom prst="rect">
             <a:avLst/>
@@ -17464,7 +17464,7 @@
               <a:buNone/>
             </a:pPr>
             <a:r>
-              <a:rPr lang="en-US" sz="2400" dirty="0">
+              <a:rPr lang="en-US" sz="2200" dirty="0">
                 <a:solidFill>
                   <a:srgbClr val="F2F0EA"/>
                 </a:solidFill>
@@ -17472,9 +17472,9 @@
                 <a:ea typeface="Arial" pitchFamily="34" charset="-122"/>
                 <a:cs typeface="Arial" pitchFamily="34" charset="-120"/>
               </a:rPr>
-              <a:t>Absolve toda a gente: ninguém ofende a Deus</a:t>
-            </a:r>
-            <a:endParaRPr lang="en-US" sz="2400" dirty="0"/>
+              <a:t>Absolve toda a gente: nem peixes nem homens ofendem a Deus</a:t>
+            </a:r>
+            <a:endParaRPr lang="en-US" sz="2200" dirty="0"/>
           </a:p>
         </p:txBody>
       </p:sp>
@@ -17715,7 +17715,7 @@
               <a:buNone/>
             </a:pPr>
             <a:r>
-              <a:rPr lang="en-US" sz="2800" b="1" dirty="0">
+              <a:rPr lang="en-US" sz="3400" b="1" dirty="0">
                 <a:solidFill>
                   <a:srgbClr val="F2F0EA"/>
                 </a:solidFill>
@@ -17723,9 +17723,9 @@
                 <a:ea typeface="Arial" pitchFamily="34" charset="-122"/>
                 <a:cs typeface="Arial" pitchFamily="34" charset="-120"/>
               </a:rPr>
-              <a:t>Inverte-o: o pregador, que tem palavra, memória, entendimento e vontade, é quem mais pode ofender; os peixes ficam absolvidos</a:t>
-            </a:r>
-            <a:endParaRPr lang="en-US" sz="2800" dirty="0"/>
+              <a:t>Inverte-o: absolve os peixes e acusa o próprio pregador</a:t>
+            </a:r>
+            <a:endParaRPr lang="en-US" sz="3400" dirty="0"/>
           </a:p>
         </p:txBody>
       </p:sp>
@@ -24834,7 +24834,7 @@
         <p:spPr>
           <a:xfrm>
             <a:off x="1005840" y="2697480"/>
-            <a:ext cx="0" cy="2563368"/>
+            <a:ext cx="0" cy="2182368"/>
           </a:xfrm>
           <a:prstGeom prst="line">
             <a:avLst/>
@@ -24921,7 +24921,7 @@
         <p:spPr>
           <a:xfrm>
             <a:off x="1417320" y="2523744"/>
-            <a:ext cx="9174175" cy="981456"/>
+            <a:ext cx="9174175" cy="600456"/>
           </a:xfrm>
           <a:prstGeom prst="rect">
             <a:avLst/>
@@ -24950,7 +24950,7 @@
                 <a:ea typeface="Arial" pitchFamily="34" charset="-122"/>
                 <a:cs typeface="Arial" pitchFamily="34" charset="-120"/>
               </a:rPr>
-              <a:t>Diz que os homens são como os peixes que se comem: a testemunha fala de homens, não de peixes</a:t>
+              <a:t>Diz que os homens são como os peixes que se comem</a:t>
             </a:r>
             <a:endParaRPr lang="en-US" sz="2400" dirty="0"/>
           </a:p>
@@ -24964,7 +24964,7 @@
         </p:nvSpPr>
         <p:spPr>
           <a:xfrm>
-            <a:off x="822960" y="3496056"/>
+            <a:off x="822960" y="3115056"/>
             <a:ext cx="365760" cy="365760"/>
           </a:xfrm>
           <a:prstGeom prst="ellipse">
@@ -24989,7 +24989,7 @@
         </p:nvSpPr>
         <p:spPr>
           <a:xfrm>
-            <a:off x="822960" y="3496056"/>
+            <a:off x="822960" y="3115056"/>
             <a:ext cx="365760" cy="365760"/>
           </a:xfrm>
           <a:prstGeom prst="rect">
@@ -25028,7 +25028,7 @@
         </p:nvSpPr>
         <p:spPr>
           <a:xfrm>
-            <a:off x="1417320" y="3505200"/>
+            <a:off x="1417320" y="3124200"/>
             <a:ext cx="9174175" cy="981456"/>
           </a:xfrm>
           <a:prstGeom prst="rect">
@@ -25058,7 +25058,7 @@
                 <a:ea typeface="Arial" pitchFamily="34" charset="-122"/>
                 <a:cs typeface="Arial" pitchFamily="34" charset="-120"/>
               </a:rPr>
-              <a:t>Prova, com observação do mar, que os peixes grandes comem os pequenos</a:t>
+              <a:t>Prova, observando o mar, que os grandes comem os pequenos</a:t>
             </a:r>
             <a:endParaRPr lang="en-US" sz="2400" dirty="0"/>
           </a:p>
@@ -25072,7 +25072,7 @@
         </p:nvSpPr>
         <p:spPr>
           <a:xfrm>
-            <a:off x="822960" y="4477512"/>
+            <a:off x="822960" y="4096512"/>
             <a:ext cx="365760" cy="365760"/>
           </a:xfrm>
           <a:prstGeom prst="ellipse">
@@ -25097,7 +25097,7 @@
         </p:nvSpPr>
         <p:spPr>
           <a:xfrm>
-            <a:off x="822960" y="4477512"/>
+            <a:off x="822960" y="4096512"/>
             <a:ext cx="365760" cy="365760"/>
           </a:xfrm>
           <a:prstGeom prst="rect">
@@ -25136,7 +25136,7 @@
         </p:nvSpPr>
         <p:spPr>
           <a:xfrm>
-            <a:off x="1417320" y="4486656"/>
+            <a:off x="1417320" y="4105656"/>
             <a:ext cx="9174175" cy="600456"/>
           </a:xfrm>
           <a:prstGeom prst="rect">
@@ -25180,7 +25180,7 @@
         </p:nvSpPr>
         <p:spPr>
           <a:xfrm>
-            <a:off x="822960" y="5077968"/>
+            <a:off x="822960" y="4696968"/>
             <a:ext cx="365760" cy="365760"/>
           </a:xfrm>
           <a:prstGeom prst="ellipse">
@@ -25205,7 +25205,7 @@
         </p:nvSpPr>
         <p:spPr>
           <a:xfrm>
-            <a:off x="822960" y="5077968"/>
+            <a:off x="822960" y="4696968"/>
             <a:ext cx="365760" cy="365760"/>
           </a:xfrm>
           <a:prstGeom prst="rect">
@@ -25244,7 +25244,7 @@
         </p:nvSpPr>
         <p:spPr>
           <a:xfrm>
-            <a:off x="1417320" y="5087112"/>
+            <a:off x="1417320" y="4706112"/>
             <a:ext cx="9174175" cy="600456"/>
           </a:xfrm>
           <a:prstGeom prst="rect">
@@ -25274,7 +25274,7 @@
                 <a:ea typeface="Arial" pitchFamily="34" charset="-122"/>
                 <a:cs typeface="Arial" pitchFamily="34" charset="-120"/>
               </a:rPr>
-              <a:t>Mostra que Agostinho também pregou aos peixes</a:t>
+              <a:t>Mostra que Santo Agostinho também pregou aos peixes</a:t>
             </a:r>
             <a:endParaRPr lang="en-US" sz="2400" dirty="0"/>
           </a:p>
